--- a/media/resources/files/4-Amal-intro_FSurF9X.pptx
+++ b/media/resources/files/4-Amal-intro_FSurF9X.pptx
@@ -22455,7 +22455,7 @@
             </a:pPr>
             <a:r>
               <a:rPr lang="ru-RU" dirty="0"/>
-              <a:t>Турдуу пикирлер учун ыраазычылык билдиребиз.</a:t>
+              <a:t>Түрдүү пикирлер үчүн ыраазычылык билдиребиз.</a:t>
             </a:r>
           </a:p>
           <a:p>

--- a/media/resources/files/4-Amal-intro_FSurF9X.pptx
+++ b/media/resources/files/4-Amal-intro_FSurF9X.pptx
@@ -5085,7 +5085,7 @@
           <a:p>
             <a:r>
               <a:rPr lang="ru-RU" dirty="0"/>
-              <a:t>Бул ресурс математикалык ыкманын жандуу демонстрацияларын камсыз кылат.</a:t>
+              <a:t>Бул ресурс ыкманы жандуу көрсөтөт.</a:t>
             </a:r>
           </a:p>
           <a:p>
@@ -33287,7 +33287,7 @@
                     </a:solidFill>
                     <a:effectLst/>
                   </a:rPr>
-                  <a:t> , </a:t>
+                  <a:t>, </a:t>
                 </a:r>
                 <a:r>
                   <a:rPr lang="ru-RU" sz="3200" b="1" i="0" dirty="0">
@@ -33683,7 +33683,7 @@
                   <a:srgbClr val="FF0000"/>
                 </a:solidFill>
               </a:rPr>
-              <a:t>Кыскача эстеп калуу учун</a:t>
+              <a:t>Кыскача эстеп калуу үчүн</a:t>
             </a:r>
           </a:p>
           <a:p>
